--- a/decks/hist-russian-revolution/hist-russian-revolution_ch1_tsarist-russia.pptx
+++ b/decks/hist-russian-revolution/hist-russian-revolution_ch1_tsarist-russia.pptx
@@ -129,31 +129,31 @@
   <p:extLst>
     <p:ext uri="{521415D9-36F7-43E2-AB2F-B90AF26B5E84}">
       <p14:sectionLst xmlns:p14="http://schemas.microsoft.com/office/powerpoint/2010/main">
-        <p14:section name="Opening" id="{5d221bc0-c577-b5eb-00f3-0489db22c36a}">
+        <p14:section name="Opening" id="{a38a3ec4-1b89-a2b1-e3c4-d1f4af3005c5}">
           <p14:sldIdLst>
             <p14:sldId id="256"/>
           </p14:sldIdLst>
         </p14:section>
-        <p14:section name="Gate" id="{49e2c375-6971-c517-af7c-0b88b9511e8d}">
+        <p14:section name="Gate" id="{0c398d51-03ee-06c2-9dc1-b443b05ddcfb}">
           <p14:sldIdLst>
             <p14:sldId id="257"/>
             <p14:sldId id="258"/>
             <p14:sldId id="259"/>
           </p14:sldIdLst>
         </p14:section>
-        <p14:section name="Pre-teach" id="{e5856b92-07f1-34a6-306c-eeaa5a8f5976}">
+        <p14:section name="Pre-teach" id="{78f5ce32-3e27-bdcb-ac70-f63e082dae03}">
           <p14:sldIdLst>
             <p14:sldId id="260"/>
             <p14:sldId id="261"/>
           </p14:sldIdLst>
         </p14:section>
-        <p14:section name="Read-along" id="{e9199eed-d2b1-a950-9b07-60822512c2a6}">
+        <p14:section name="Read-along" id="{15c537a3-dc97-d816-f738-355e6192e48a}">
           <p14:sldIdLst>
             <p14:sldId id="262"/>
             <p14:sldId id="263"/>
           </p14:sldIdLst>
         </p14:section>
-        <p14:section name="Teach" id="{25cddf84-1967-3549-aed9-388d2a50a789}">
+        <p14:section name="Teach" id="{201b1517-0d67-4290-aef4-e44bfad12739}">
           <p14:sldIdLst>
             <p14:sldId id="264"/>
             <p14:sldId id="265"/>
@@ -163,7 +163,7 @@
             <p14:sldId id="269"/>
           </p14:sldIdLst>
         </p14:section>
-        <p14:section name="Routes" id="{9fdf3316-8eb5-19b8-64e0-d58fa288466d}">
+        <p14:section name="Routes" id="{9cd2b3e3-c719-9998-5153-ba254b5fd589}">
           <p14:sldIdLst>
             <p14:sldId id="270"/>
             <p14:sldId id="271"/>
@@ -171,12 +171,12 @@
             <p14:sldId id="273"/>
           </p14:sldIdLst>
         </p14:section>
-        <p14:section name="Close" id="{d1f91bda-cf06-8af4-994a-0d9980292831}">
+        <p14:section name="Close" id="{9f62e7f9-7624-d145-176f-865a048bae04}">
           <p14:sldIdLst>
             <p14:sldId id="274"/>
           </p14:sldIdLst>
         </p14:section>
-        <p14:section name="Answers" id="{fca2909e-de1e-4ee6-8e11-cd69aa03b708}">
+        <p14:section name="Answers" id="{ac82fd37-81d6-b44a-01cf-b0add35b6202}">
           <p14:sldIdLst>
             <p14:sldId id="275"/>
             <p14:sldId id="276"/>
